--- a/Fig/坐标系.pptx
+++ b/Fig/坐标系.pptx
@@ -9,6 +9,7 @@
     <p:sldId id="258" r:id="rId4"/>
     <p:sldId id="259" r:id="rId5"/>
     <p:sldId id="260" r:id="rId6"/>
+    <p:sldId id="261" r:id="rId7"/>
   </p:sldIdLst>
   <p:sldSz cx="2519680" cy="2519680"/>
   <p:notesSz cx="6858000" cy="9144000"/>
@@ -8587,6 +8588,1268 @@
     </p:spTree>
     <p:custDataLst>
       <p:tags r:id="rId34"/>
+    </p:custDataLst>
+  </p:cSld>
+  <p:clrMapOvr>
+    <a:masterClrMapping/>
+  </p:clrMapOvr>
+</p:sld>
+</file>
+
+<file path=ppt/slides/slide5.xml><?xml version="1.0" encoding="utf-8"?>
+<p:sld xmlns:a="http://schemas.openxmlformats.org/drawingml/2006/main" xmlns:r="http://schemas.openxmlformats.org/officeDocument/2006/relationships" xmlns:p="http://schemas.openxmlformats.org/presentationml/2006/main">
+  <p:cSld>
+    <p:spTree>
+      <p:nvGrpSpPr>
+        <p:cNvPr id="1" name=""/>
+        <p:cNvGrpSpPr/>
+        <p:nvPr/>
+      </p:nvGrpSpPr>
+      <p:grpSpPr/>
+      <p:pic>
+        <p:nvPicPr>
+          <p:cNvPr id="10" name="图片 9"/>
+          <p:cNvPicPr>
+            <a:picLocks noChangeAspect="1"/>
+          </p:cNvPicPr>
+          <p:nvPr/>
+        </p:nvPicPr>
+        <p:blipFill>
+          <a:blip r:embed="rId1"/>
+          <a:stretch>
+            <a:fillRect/>
+          </a:stretch>
+        </p:blipFill>
+        <p:spPr>
+          <a:xfrm rot="480000">
+            <a:off x="266700" y="267970"/>
+            <a:ext cx="1556385" cy="2021840"/>
+          </a:xfrm>
+          <a:prstGeom prst="rect">
+            <a:avLst/>
+          </a:prstGeom>
+        </p:spPr>
+      </p:pic>
+      <p:sp>
+        <p:nvSpPr>
+          <p:cNvPr id="2" name="椭圆 1"/>
+          <p:cNvSpPr/>
+          <p:nvPr/>
+        </p:nvSpPr>
+        <p:spPr>
+          <a:xfrm>
+            <a:off x="206375" y="763270"/>
+            <a:ext cx="2225040" cy="683895"/>
+          </a:xfrm>
+          <a:prstGeom prst="ellipse">
+            <a:avLst/>
+          </a:prstGeom>
+          <a:ln w="3175" cmpd="sng">
+            <a:solidFill>
+              <a:schemeClr val="tx1"/>
+            </a:solidFill>
+            <a:prstDash val="dash"/>
+          </a:ln>
+        </p:spPr>
+        <p:style>
+          <a:lnRef idx="2">
+            <a:schemeClr val="accent1"/>
+          </a:lnRef>
+          <a:fillRef idx="0">
+            <a:srgbClr val="FFFFFF"/>
+          </a:fillRef>
+          <a:effectRef idx="0">
+            <a:srgbClr val="FFFFFF"/>
+          </a:effectRef>
+          <a:fontRef idx="minor">
+            <a:schemeClr val="tx1"/>
+          </a:fontRef>
+        </p:style>
+        <p:txBody>
+          <a:bodyPr rtlCol="0" anchor="ctr"/>
+          <a:p>
+            <a:pPr algn="ctr"/>
+            <a:endParaRPr lang="zh-CN" altLang="en-US"/>
+          </a:p>
+        </p:txBody>
+      </p:sp>
+      <p:sp>
+        <p:nvSpPr>
+          <p:cNvPr id="3" name="椭圆 2"/>
+          <p:cNvSpPr/>
+          <p:nvPr/>
+        </p:nvSpPr>
+        <p:spPr>
+          <a:xfrm rot="16200000">
+            <a:off x="196215" y="744855"/>
+            <a:ext cx="2324100" cy="868045"/>
+          </a:xfrm>
+          <a:prstGeom prst="ellipse">
+            <a:avLst/>
+          </a:prstGeom>
+          <a:ln w="3175" cmpd="sng">
+            <a:solidFill>
+              <a:schemeClr val="tx1"/>
+            </a:solidFill>
+            <a:prstDash val="dash"/>
+          </a:ln>
+        </p:spPr>
+        <p:style>
+          <a:lnRef idx="2">
+            <a:schemeClr val="accent1"/>
+          </a:lnRef>
+          <a:fillRef idx="0">
+            <a:srgbClr val="FFFFFF"/>
+          </a:fillRef>
+          <a:effectRef idx="0">
+            <a:srgbClr val="FFFFFF"/>
+          </a:effectRef>
+          <a:fontRef idx="minor">
+            <a:schemeClr val="tx1"/>
+          </a:fontRef>
+        </p:style>
+        <p:txBody>
+          <a:bodyPr rtlCol="0" anchor="ctr"/>
+          <a:p>
+            <a:pPr algn="ctr"/>
+            <a:endParaRPr lang="zh-CN" altLang="en-US"/>
+          </a:p>
+        </p:txBody>
+      </p:sp>
+      <p:sp>
+        <p:nvSpPr>
+          <p:cNvPr id="4" name="椭圆 3"/>
+          <p:cNvSpPr/>
+          <p:nvPr/>
+        </p:nvSpPr>
+        <p:spPr>
+          <a:xfrm rot="16200000">
+            <a:off x="224155" y="169545"/>
+            <a:ext cx="2188845" cy="2019300"/>
+          </a:xfrm>
+          <a:prstGeom prst="ellipse">
+            <a:avLst/>
+          </a:prstGeom>
+          <a:ln w="3175" cmpd="sng">
+            <a:solidFill>
+              <a:schemeClr val="tx1"/>
+            </a:solidFill>
+            <a:prstDash val="dash"/>
+          </a:ln>
+        </p:spPr>
+        <p:style>
+          <a:lnRef idx="2">
+            <a:schemeClr val="accent1"/>
+          </a:lnRef>
+          <a:fillRef idx="0">
+            <a:srgbClr val="FFFFFF"/>
+          </a:fillRef>
+          <a:effectRef idx="0">
+            <a:srgbClr val="FFFFFF"/>
+          </a:effectRef>
+          <a:fontRef idx="minor">
+            <a:schemeClr val="tx1"/>
+          </a:fontRef>
+        </p:style>
+        <p:txBody>
+          <a:bodyPr rtlCol="0" anchor="ctr"/>
+          <a:p>
+            <a:pPr algn="ctr"/>
+            <a:endParaRPr lang="zh-CN" altLang="en-US"/>
+          </a:p>
+        </p:txBody>
+      </p:sp>
+      <p:cxnSp>
+        <p:nvCxnSpPr>
+          <p:cNvPr id="12" name="直接箭头连接符 11"/>
+          <p:cNvCxnSpPr/>
+          <p:nvPr/>
+        </p:nvCxnSpPr>
+        <p:spPr>
+          <a:xfrm flipH="1">
+            <a:off x="716915" y="1181735"/>
+            <a:ext cx="641350" cy="205105"/>
+          </a:xfrm>
+          <a:prstGeom prst="straightConnector1">
+            <a:avLst/>
+          </a:prstGeom>
+          <a:ln w="12700">
+            <a:solidFill>
+              <a:srgbClr val="007EFF"/>
+            </a:solidFill>
+            <a:tailEnd type="triangle"/>
+          </a:ln>
+        </p:spPr>
+        <p:style>
+          <a:lnRef idx="2">
+            <a:schemeClr val="accent1"/>
+          </a:lnRef>
+          <a:fillRef idx="0">
+            <a:srgbClr val="FFFFFF"/>
+          </a:fillRef>
+          <a:effectRef idx="0">
+            <a:srgbClr val="FFFFFF"/>
+          </a:effectRef>
+          <a:fontRef idx="minor">
+            <a:schemeClr val="tx1"/>
+          </a:fontRef>
+        </p:style>
+      </p:cxnSp>
+      <p:cxnSp>
+        <p:nvCxnSpPr>
+          <p:cNvPr id="13" name="直接箭头连接符 12"/>
+          <p:cNvCxnSpPr/>
+          <p:nvPr/>
+        </p:nvCxnSpPr>
+        <p:spPr>
+          <a:xfrm>
+            <a:off x="1355090" y="1183005"/>
+            <a:ext cx="643890" cy="194945"/>
+          </a:xfrm>
+          <a:prstGeom prst="straightConnector1">
+            <a:avLst/>
+          </a:prstGeom>
+          <a:ln w="12700">
+            <a:solidFill>
+              <a:srgbClr val="007EFF"/>
+            </a:solidFill>
+            <a:tailEnd type="triangle"/>
+          </a:ln>
+        </p:spPr>
+        <p:style>
+          <a:lnRef idx="2">
+            <a:schemeClr val="accent1"/>
+          </a:lnRef>
+          <a:fillRef idx="0">
+            <a:srgbClr val="FFFFFF"/>
+          </a:fillRef>
+          <a:effectRef idx="0">
+            <a:srgbClr val="FFFFFF"/>
+          </a:effectRef>
+          <a:fontRef idx="minor">
+            <a:schemeClr val="tx1"/>
+          </a:fontRef>
+        </p:style>
+      </p:cxnSp>
+      <p:cxnSp>
+        <p:nvCxnSpPr>
+          <p:cNvPr id="14" name="直接箭头连接符 13"/>
+          <p:cNvCxnSpPr>
+            <a:endCxn id="3" idx="2"/>
+          </p:cNvCxnSpPr>
+          <p:nvPr/>
+        </p:nvCxnSpPr>
+        <p:spPr>
+          <a:xfrm>
+            <a:off x="1355090" y="1178560"/>
+            <a:ext cx="3175" cy="1162685"/>
+          </a:xfrm>
+          <a:prstGeom prst="straightConnector1">
+            <a:avLst/>
+          </a:prstGeom>
+          <a:ln w="12700">
+            <a:solidFill>
+              <a:srgbClr val="007EFF"/>
+            </a:solidFill>
+            <a:tailEnd type="triangle"/>
+          </a:ln>
+        </p:spPr>
+        <p:style>
+          <a:lnRef idx="2">
+            <a:schemeClr val="accent1"/>
+          </a:lnRef>
+          <a:fillRef idx="0">
+            <a:srgbClr val="FFFFFF"/>
+          </a:fillRef>
+          <a:effectRef idx="0">
+            <a:srgbClr val="FFFFFF"/>
+          </a:effectRef>
+          <a:fontRef idx="minor">
+            <a:schemeClr val="tx1"/>
+          </a:fontRef>
+        </p:style>
+      </p:cxnSp>
+      <p:cxnSp>
+        <p:nvCxnSpPr>
+          <p:cNvPr id="15" name="直接箭头连接符 14"/>
+          <p:cNvCxnSpPr/>
+          <p:nvPr/>
+        </p:nvCxnSpPr>
+        <p:spPr>
+          <a:xfrm flipH="1" flipV="1">
+            <a:off x="337185" y="948690"/>
+            <a:ext cx="1014730" cy="231140"/>
+          </a:xfrm>
+          <a:prstGeom prst="straightConnector1">
+            <a:avLst/>
+          </a:prstGeom>
+          <a:ln w="12700">
+            <a:solidFill>
+              <a:srgbClr val="FF0000"/>
+            </a:solidFill>
+            <a:tailEnd type="triangle"/>
+          </a:ln>
+        </p:spPr>
+        <p:style>
+          <a:lnRef idx="2">
+            <a:schemeClr val="accent1"/>
+          </a:lnRef>
+          <a:fillRef idx="0">
+            <a:srgbClr val="FFFFFF"/>
+          </a:fillRef>
+          <a:effectRef idx="0">
+            <a:srgbClr val="FFFFFF"/>
+          </a:effectRef>
+          <a:fontRef idx="minor">
+            <a:schemeClr val="tx1"/>
+          </a:fontRef>
+        </p:style>
+      </p:cxnSp>
+      <p:cxnSp>
+        <p:nvCxnSpPr>
+          <p:cNvPr id="16" name="直接箭头连接符 15"/>
+          <p:cNvCxnSpPr/>
+          <p:nvPr/>
+        </p:nvCxnSpPr>
+        <p:spPr>
+          <a:xfrm>
+            <a:off x="1350010" y="1181100"/>
+            <a:ext cx="403860" cy="431165"/>
+          </a:xfrm>
+          <a:prstGeom prst="straightConnector1">
+            <a:avLst/>
+          </a:prstGeom>
+          <a:ln w="12700">
+            <a:solidFill>
+              <a:srgbClr val="FF0000"/>
+            </a:solidFill>
+            <a:tailEnd type="triangle"/>
+          </a:ln>
+        </p:spPr>
+        <p:style>
+          <a:lnRef idx="2">
+            <a:schemeClr val="accent1"/>
+          </a:lnRef>
+          <a:fillRef idx="0">
+            <a:srgbClr val="FFFFFF"/>
+          </a:fillRef>
+          <a:effectRef idx="0">
+            <a:srgbClr val="FFFFFF"/>
+          </a:effectRef>
+          <a:fontRef idx="minor">
+            <a:schemeClr val="tx1"/>
+          </a:fontRef>
+        </p:style>
+      </p:cxnSp>
+      <p:cxnSp>
+        <p:nvCxnSpPr>
+          <p:cNvPr id="17" name="直接箭头连接符 16"/>
+          <p:cNvCxnSpPr/>
+          <p:nvPr/>
+        </p:nvCxnSpPr>
+        <p:spPr>
+          <a:xfrm flipH="1">
+            <a:off x="835025" y="1174750"/>
+            <a:ext cx="517525" cy="965200"/>
+          </a:xfrm>
+          <a:prstGeom prst="straightConnector1">
+            <a:avLst/>
+          </a:prstGeom>
+          <a:ln w="12700">
+            <a:solidFill>
+              <a:srgbClr val="FF0000"/>
+            </a:solidFill>
+            <a:tailEnd type="triangle"/>
+          </a:ln>
+        </p:spPr>
+        <p:style>
+          <a:lnRef idx="2">
+            <a:schemeClr val="accent1"/>
+          </a:lnRef>
+          <a:fillRef idx="0">
+            <a:srgbClr val="FFFFFF"/>
+          </a:fillRef>
+          <a:effectRef idx="0">
+            <a:srgbClr val="FFFFFF"/>
+          </a:effectRef>
+          <a:fontRef idx="minor">
+            <a:schemeClr val="tx1"/>
+          </a:fontRef>
+        </p:style>
+      </p:cxnSp>
+      <p:graphicFrame>
+        <p:nvGraphicFramePr>
+          <p:cNvPr id="18" name="对象 -2147482496"/>
+          <p:cNvGraphicFramePr>
+            <a:graphicFrameLocks noChangeAspect="1"/>
+          </p:cNvGraphicFramePr>
+          <p:nvPr/>
+        </p:nvGraphicFramePr>
+        <p:xfrm>
+          <a:off x="1181100" y="969010"/>
+          <a:ext cx="563880" cy="190500"/>
+        </p:xfrm>
+        <a:graphic>
+          <a:graphicData uri="http://schemas.openxmlformats.org/presentationml/2006/ole">
+            <mc:AlternateContent xmlns:mc="http://schemas.openxmlformats.org/markup-compatibility/2006">
+              <mc:Choice xmlns:v="urn:schemas-microsoft-com:vml" Requires="v">
+                <p:oleObj spid="_x0000_s3076" name="" r:id="rId2" imgW="558800" imgH="190500" progId="DSEquations">
+                  <p:embed/>
+                </p:oleObj>
+              </mc:Choice>
+              <mc:Fallback>
+                <p:oleObj name="" r:id="rId2" imgW="558800" imgH="190500" progId="DSEquations">
+                  <p:embed/>
+                  <p:pic>
+                    <p:nvPicPr>
+                      <p:cNvPr id="0" name="图片 3075"/>
+                      <p:cNvPicPr/>
+                      <p:nvPr/>
+                    </p:nvPicPr>
+                    <p:blipFill>
+                      <a:blip r:embed="rId3"/>
+                      <a:stretch>
+                        <a:fillRect/>
+                      </a:stretch>
+                    </p:blipFill>
+                    <p:spPr>
+                      <a:xfrm>
+                        <a:off x="1181100" y="969010"/>
+                        <a:ext cx="563880" cy="190500"/>
+                      </a:xfrm>
+                      <a:prstGeom prst="rect">
+                        <a:avLst/>
+                      </a:prstGeom>
+                      <a:noFill/>
+                      <a:ln w="38100">
+                        <a:noFill/>
+                        <a:miter/>
+                      </a:ln>
+                    </p:spPr>
+                  </p:pic>
+                </p:oleObj>
+              </mc:Fallback>
+            </mc:AlternateContent>
+          </a:graphicData>
+        </a:graphic>
+      </p:graphicFrame>
+      <p:graphicFrame>
+        <p:nvGraphicFramePr>
+          <p:cNvPr id="33" name="对象 -2147482496"/>
+          <p:cNvGraphicFramePr>
+            <a:graphicFrameLocks noChangeAspect="1"/>
+          </p:cNvGraphicFramePr>
+          <p:nvPr/>
+        </p:nvGraphicFramePr>
+        <p:xfrm>
+          <a:off x="1744980" y="1640205"/>
+          <a:ext cx="191135" cy="190500"/>
+        </p:xfrm>
+        <a:graphic>
+          <a:graphicData uri="http://schemas.openxmlformats.org/presentationml/2006/ole">
+            <mc:AlternateContent xmlns:mc="http://schemas.openxmlformats.org/markup-compatibility/2006">
+              <mc:Choice xmlns:v="urn:schemas-microsoft-com:vml" Requires="v">
+                <p:oleObj spid="_x0000_s34" name="" r:id="rId4" imgW="190500" imgH="190500" progId="DSEquations">
+                  <p:embed/>
+                </p:oleObj>
+              </mc:Choice>
+              <mc:Fallback>
+                <p:oleObj name="" r:id="rId4" imgW="190500" imgH="190500" progId="DSEquations">
+                  <p:embed/>
+                  <p:pic>
+                    <p:nvPicPr>
+                      <p:cNvPr id="0" name="图片 3075"/>
+                      <p:cNvPicPr/>
+                      <p:nvPr/>
+                    </p:nvPicPr>
+                    <p:blipFill>
+                      <a:blip r:embed="rId5"/>
+                      <a:stretch>
+                        <a:fillRect/>
+                      </a:stretch>
+                    </p:blipFill>
+                    <p:spPr>
+                      <a:xfrm>
+                        <a:off x="1744980" y="1640205"/>
+                        <a:ext cx="191135" cy="190500"/>
+                      </a:xfrm>
+                      <a:prstGeom prst="rect">
+                        <a:avLst/>
+                      </a:prstGeom>
+                      <a:noFill/>
+                      <a:ln w="38100">
+                        <a:noFill/>
+                        <a:miter/>
+                      </a:ln>
+                    </p:spPr>
+                  </p:pic>
+                </p:oleObj>
+              </mc:Fallback>
+            </mc:AlternateContent>
+          </a:graphicData>
+        </a:graphic>
+      </p:graphicFrame>
+      <p:graphicFrame>
+        <p:nvGraphicFramePr>
+          <p:cNvPr id="35" name="对象 -2147482496"/>
+          <p:cNvGraphicFramePr>
+            <a:graphicFrameLocks noChangeAspect="1"/>
+          </p:cNvGraphicFramePr>
+          <p:nvPr/>
+        </p:nvGraphicFramePr>
+        <p:xfrm>
+          <a:off x="178435" y="763270"/>
+          <a:ext cx="165100" cy="190500"/>
+        </p:xfrm>
+        <a:graphic>
+          <a:graphicData uri="http://schemas.openxmlformats.org/presentationml/2006/ole">
+            <mc:AlternateContent xmlns:mc="http://schemas.openxmlformats.org/markup-compatibility/2006">
+              <mc:Choice xmlns:v="urn:schemas-microsoft-com:vml" Requires="v">
+                <p:oleObj spid="_x0000_s36" name="" r:id="rId6" imgW="165100" imgH="190500" progId="DSEquations">
+                  <p:embed/>
+                </p:oleObj>
+              </mc:Choice>
+              <mc:Fallback>
+                <p:oleObj name="" r:id="rId6" imgW="165100" imgH="190500" progId="DSEquations">
+                  <p:embed/>
+                  <p:pic>
+                    <p:nvPicPr>
+                      <p:cNvPr id="0" name="图片 3075"/>
+                      <p:cNvPicPr/>
+                      <p:nvPr/>
+                    </p:nvPicPr>
+                    <p:blipFill>
+                      <a:blip r:embed="rId7"/>
+                      <a:stretch>
+                        <a:fillRect/>
+                      </a:stretch>
+                    </p:blipFill>
+                    <p:spPr>
+                      <a:xfrm>
+                        <a:off x="178435" y="763270"/>
+                        <a:ext cx="165100" cy="190500"/>
+                      </a:xfrm>
+                      <a:prstGeom prst="rect">
+                        <a:avLst/>
+                      </a:prstGeom>
+                      <a:noFill/>
+                      <a:ln w="38100">
+                        <a:noFill/>
+                        <a:miter/>
+                      </a:ln>
+                    </p:spPr>
+                  </p:pic>
+                </p:oleObj>
+              </mc:Fallback>
+            </mc:AlternateContent>
+          </a:graphicData>
+        </a:graphic>
+      </p:graphicFrame>
+      <p:graphicFrame>
+        <p:nvGraphicFramePr>
+          <p:cNvPr id="37" name="对象 -2147482496"/>
+          <p:cNvGraphicFramePr>
+            <a:graphicFrameLocks noChangeAspect="1"/>
+          </p:cNvGraphicFramePr>
+          <p:nvPr/>
+        </p:nvGraphicFramePr>
+        <p:xfrm>
+          <a:off x="1945640" y="1370965"/>
+          <a:ext cx="177165" cy="190500"/>
+        </p:xfrm>
+        <a:graphic>
+          <a:graphicData uri="http://schemas.openxmlformats.org/presentationml/2006/ole">
+            <mc:AlternateContent xmlns:mc="http://schemas.openxmlformats.org/markup-compatibility/2006">
+              <mc:Choice xmlns:v="urn:schemas-microsoft-com:vml" Requires="v">
+                <p:oleObj spid="_x0000_s38" name="" r:id="rId8" imgW="177165" imgH="190500" progId="DSEquations">
+                  <p:embed/>
+                </p:oleObj>
+              </mc:Choice>
+              <mc:Fallback>
+                <p:oleObj name="" r:id="rId8" imgW="177165" imgH="190500" progId="DSEquations">
+                  <p:embed/>
+                  <p:pic>
+                    <p:nvPicPr>
+                      <p:cNvPr id="0" name="图片 3075"/>
+                      <p:cNvPicPr/>
+                      <p:nvPr/>
+                    </p:nvPicPr>
+                    <p:blipFill>
+                      <a:blip r:embed="rId9"/>
+                      <a:stretch>
+                        <a:fillRect/>
+                      </a:stretch>
+                    </p:blipFill>
+                    <p:spPr>
+                      <a:xfrm>
+                        <a:off x="1945640" y="1370965"/>
+                        <a:ext cx="177165" cy="190500"/>
+                      </a:xfrm>
+                      <a:prstGeom prst="rect">
+                        <a:avLst/>
+                      </a:prstGeom>
+                      <a:noFill/>
+                      <a:ln w="38100">
+                        <a:noFill/>
+                        <a:miter/>
+                      </a:ln>
+                    </p:spPr>
+                  </p:pic>
+                </p:oleObj>
+              </mc:Fallback>
+            </mc:AlternateContent>
+          </a:graphicData>
+        </a:graphic>
+      </p:graphicFrame>
+      <p:cxnSp>
+        <p:nvCxnSpPr>
+          <p:cNvPr id="19" name="直接箭头连接符 18"/>
+          <p:cNvCxnSpPr/>
+          <p:nvPr/>
+        </p:nvCxnSpPr>
+        <p:spPr>
+          <a:xfrm>
+            <a:off x="1357291" y="1188871"/>
+            <a:ext cx="426720" cy="222885"/>
+          </a:xfrm>
+          <a:prstGeom prst="straightConnector1">
+            <a:avLst/>
+          </a:prstGeom>
+          <a:ln w="12700" cap="rnd" cmpd="sng">
+            <a:solidFill>
+              <a:srgbClr val="F97C3D"/>
+            </a:solidFill>
+            <a:prstDash val="solid"/>
+            <a:miter lim="800000"/>
+            <a:tailEnd type="triangle" w="sm" len="sm"/>
+          </a:ln>
+        </p:spPr>
+        <p:style>
+          <a:lnRef idx="2">
+            <a:schemeClr val="accent1"/>
+          </a:lnRef>
+          <a:fillRef idx="0">
+            <a:srgbClr val="FFFFFF"/>
+          </a:fillRef>
+          <a:effectRef idx="0">
+            <a:srgbClr val="FFFFFF"/>
+          </a:effectRef>
+          <a:fontRef idx="minor">
+            <a:schemeClr val="tx1"/>
+          </a:fontRef>
+        </p:style>
+      </p:cxnSp>
+      <p:graphicFrame>
+        <p:nvGraphicFramePr>
+          <p:cNvPr id="39" name="对象 -2147482496"/>
+          <p:cNvGraphicFramePr>
+            <a:graphicFrameLocks noChangeAspect="1"/>
+          </p:cNvGraphicFramePr>
+          <p:nvPr/>
+        </p:nvGraphicFramePr>
+        <p:xfrm>
+          <a:off x="1987892" y="1120973"/>
+          <a:ext cx="204470" cy="190500"/>
+        </p:xfrm>
+        <a:graphic>
+          <a:graphicData uri="http://schemas.openxmlformats.org/presentationml/2006/ole">
+            <mc:AlternateContent xmlns:mc="http://schemas.openxmlformats.org/markup-compatibility/2006">
+              <mc:Choice xmlns:v="urn:schemas-microsoft-com:vml" Requires="v">
+                <p:oleObj spid="_x0000_s40" name="" r:id="rId10" imgW="203200" imgH="190500" progId="DSEquations">
+                  <p:embed/>
+                </p:oleObj>
+              </mc:Choice>
+              <mc:Fallback>
+                <p:oleObj name="" r:id="rId10" imgW="203200" imgH="190500" progId="DSEquations">
+                  <p:embed/>
+                  <p:pic>
+                    <p:nvPicPr>
+                      <p:cNvPr id="0" name="图片 3075"/>
+                      <p:cNvPicPr/>
+                      <p:nvPr/>
+                    </p:nvPicPr>
+                    <p:blipFill>
+                      <a:blip r:embed="rId11"/>
+                      <a:stretch>
+                        <a:fillRect/>
+                      </a:stretch>
+                    </p:blipFill>
+                    <p:spPr>
+                      <a:xfrm>
+                        <a:off x="1987892" y="1120973"/>
+                        <a:ext cx="204470" cy="190500"/>
+                      </a:xfrm>
+                      <a:prstGeom prst="rect">
+                        <a:avLst/>
+                      </a:prstGeom>
+                      <a:noFill/>
+                      <a:ln w="38100">
+                        <a:noFill/>
+                        <a:miter/>
+                      </a:ln>
+                    </p:spPr>
+                  </p:pic>
+                </p:oleObj>
+              </mc:Fallback>
+            </mc:AlternateContent>
+          </a:graphicData>
+        </a:graphic>
+      </p:graphicFrame>
+      <p:graphicFrame>
+        <p:nvGraphicFramePr>
+          <p:cNvPr id="43" name="对象 -2147482496"/>
+          <p:cNvGraphicFramePr>
+            <a:graphicFrameLocks noChangeAspect="1"/>
+          </p:cNvGraphicFramePr>
+          <p:nvPr/>
+        </p:nvGraphicFramePr>
+        <p:xfrm>
+          <a:off x="466088" y="1520270"/>
+          <a:ext cx="167005" cy="190500"/>
+        </p:xfrm>
+        <a:graphic>
+          <a:graphicData uri="http://schemas.openxmlformats.org/presentationml/2006/ole">
+            <mc:AlternateContent xmlns:mc="http://schemas.openxmlformats.org/markup-compatibility/2006">
+              <mc:Choice xmlns:v="urn:schemas-microsoft-com:vml" Requires="v">
+                <p:oleObj spid="_x0000_s44" name="" r:id="rId12" imgW="165100" imgH="190500" progId="DSEquations">
+                  <p:embed/>
+                </p:oleObj>
+              </mc:Choice>
+              <mc:Fallback>
+                <p:oleObj name="" r:id="rId12" imgW="165100" imgH="190500" progId="DSEquations">
+                  <p:embed/>
+                  <p:pic>
+                    <p:nvPicPr>
+                      <p:cNvPr id="0" name="图片 3075"/>
+                      <p:cNvPicPr/>
+                      <p:nvPr/>
+                    </p:nvPicPr>
+                    <p:blipFill>
+                      <a:blip r:embed="rId13"/>
+                      <a:stretch>
+                        <a:fillRect/>
+                      </a:stretch>
+                    </p:blipFill>
+                    <p:spPr>
+                      <a:xfrm>
+                        <a:off x="466088" y="1520270"/>
+                        <a:ext cx="167005" cy="190500"/>
+                      </a:xfrm>
+                      <a:prstGeom prst="rect">
+                        <a:avLst/>
+                      </a:prstGeom>
+                      <a:noFill/>
+                      <a:ln w="38100">
+                        <a:noFill/>
+                        <a:miter/>
+                      </a:ln>
+                    </p:spPr>
+                  </p:pic>
+                </p:oleObj>
+              </mc:Fallback>
+            </mc:AlternateContent>
+          </a:graphicData>
+        </a:graphic>
+      </p:graphicFrame>
+      <p:graphicFrame>
+        <p:nvGraphicFramePr>
+          <p:cNvPr id="45" name="对象 -2147482496"/>
+          <p:cNvGraphicFramePr>
+            <a:graphicFrameLocks noChangeAspect="1"/>
+          </p:cNvGraphicFramePr>
+          <p:nvPr/>
+        </p:nvGraphicFramePr>
+        <p:xfrm>
+          <a:off x="1195576" y="2341493"/>
+          <a:ext cx="368300" cy="190500"/>
+        </p:xfrm>
+        <a:graphic>
+          <a:graphicData uri="http://schemas.openxmlformats.org/presentationml/2006/ole">
+            <mc:AlternateContent xmlns:mc="http://schemas.openxmlformats.org/markup-compatibility/2006">
+              <mc:Choice xmlns:v="urn:schemas-microsoft-com:vml" Requires="v">
+                <p:oleObj spid="_x0000_s46" name="" r:id="rId14" imgW="368300" imgH="190500" progId="DSEquations">
+                  <p:embed/>
+                </p:oleObj>
+              </mc:Choice>
+              <mc:Fallback>
+                <p:oleObj name="" r:id="rId14" imgW="368300" imgH="190500" progId="DSEquations">
+                  <p:embed/>
+                  <p:pic>
+                    <p:nvPicPr>
+                      <p:cNvPr id="0" name="图片 3075"/>
+                      <p:cNvPicPr/>
+                      <p:nvPr/>
+                    </p:nvPicPr>
+                    <p:blipFill>
+                      <a:blip r:embed="rId15"/>
+                      <a:stretch>
+                        <a:fillRect/>
+                      </a:stretch>
+                    </p:blipFill>
+                    <p:spPr>
+                      <a:xfrm>
+                        <a:off x="1195576" y="2341493"/>
+                        <a:ext cx="368300" cy="190500"/>
+                      </a:xfrm>
+                      <a:prstGeom prst="rect">
+                        <a:avLst/>
+                      </a:prstGeom>
+                      <a:noFill/>
+                      <a:ln w="38100">
+                        <a:noFill/>
+                        <a:miter/>
+                      </a:ln>
+                    </p:spPr>
+                  </p:pic>
+                </p:oleObj>
+              </mc:Fallback>
+            </mc:AlternateContent>
+          </a:graphicData>
+        </a:graphic>
+      </p:graphicFrame>
+      <p:cxnSp>
+        <p:nvCxnSpPr>
+          <p:cNvPr id="20" name="直接箭头连接符 19"/>
+          <p:cNvCxnSpPr/>
+          <p:nvPr/>
+        </p:nvCxnSpPr>
+        <p:spPr>
+          <a:xfrm flipH="1">
+            <a:off x="310811" y="1188871"/>
+            <a:ext cx="1043940" cy="68580"/>
+          </a:xfrm>
+          <a:prstGeom prst="straightConnector1">
+            <a:avLst/>
+          </a:prstGeom>
+          <a:ln w="12700" cap="rnd" cmpd="sng">
+            <a:solidFill>
+              <a:srgbClr val="FF7E3F"/>
+            </a:solidFill>
+            <a:prstDash val="solid"/>
+            <a:miter lim="800000"/>
+            <a:tailEnd type="triangle" w="sm" len="sm"/>
+          </a:ln>
+        </p:spPr>
+        <p:style>
+          <a:lnRef idx="2">
+            <a:schemeClr val="accent1"/>
+          </a:lnRef>
+          <a:fillRef idx="0">
+            <a:srgbClr val="FFFFFF"/>
+          </a:fillRef>
+          <a:effectRef idx="0">
+            <a:srgbClr val="FFFFFF"/>
+          </a:effectRef>
+          <a:fontRef idx="minor">
+            <a:schemeClr val="tx1"/>
+          </a:fontRef>
+        </p:style>
+      </p:cxnSp>
+      <p:graphicFrame>
+        <p:nvGraphicFramePr>
+          <p:cNvPr id="21" name="对象 -2147482496"/>
+          <p:cNvGraphicFramePr>
+            <a:graphicFrameLocks noChangeAspect="1"/>
+          </p:cNvGraphicFramePr>
+          <p:nvPr/>
+        </p:nvGraphicFramePr>
+        <p:xfrm>
+          <a:off x="1759610" y="1423233"/>
+          <a:ext cx="205105" cy="190500"/>
+        </p:xfrm>
+        <a:graphic>
+          <a:graphicData uri="http://schemas.openxmlformats.org/presentationml/2006/ole">
+            <mc:AlternateContent xmlns:mc="http://schemas.openxmlformats.org/markup-compatibility/2006">
+              <mc:Choice xmlns:v="urn:schemas-microsoft-com:vml" Requires="v">
+                <p:oleObj spid="_x0000_s22" name="" r:id="rId16" imgW="203200" imgH="190500" progId="DSEquations">
+                  <p:embed/>
+                </p:oleObj>
+              </mc:Choice>
+              <mc:Fallback>
+                <p:oleObj name="" r:id="rId16" imgW="203200" imgH="190500" progId="DSEquations">
+                  <p:embed/>
+                  <p:pic>
+                    <p:nvPicPr>
+                      <p:cNvPr id="0" name="图片 3075"/>
+                      <p:cNvPicPr/>
+                      <p:nvPr/>
+                    </p:nvPicPr>
+                    <p:blipFill>
+                      <a:blip r:embed="rId17"/>
+                      <a:stretch>
+                        <a:fillRect/>
+                      </a:stretch>
+                    </p:blipFill>
+                    <p:spPr>
+                      <a:xfrm>
+                        <a:off x="1759610" y="1423233"/>
+                        <a:ext cx="205105" cy="190500"/>
+                      </a:xfrm>
+                      <a:prstGeom prst="rect">
+                        <a:avLst/>
+                      </a:prstGeom>
+                      <a:noFill/>
+                      <a:ln w="38100">
+                        <a:noFill/>
+                        <a:miter/>
+                      </a:ln>
+                    </p:spPr>
+                  </p:pic>
+                </p:oleObj>
+              </mc:Fallback>
+            </mc:AlternateContent>
+          </a:graphicData>
+        </a:graphic>
+      </p:graphicFrame>
+      <p:sp>
+        <p:nvSpPr>
+          <p:cNvPr id="30" name="任意多边形 29"/>
+          <p:cNvSpPr/>
+          <p:nvPr/>
+        </p:nvSpPr>
+        <p:spPr>
+          <a:xfrm>
+            <a:off x="1767205" y="1376680"/>
+            <a:ext cx="227330" cy="43180"/>
+          </a:xfrm>
+          <a:custGeom>
+            <a:avLst/>
+            <a:gdLst>
+              <a:gd name="connisteX0" fmla="*/ 227590 w 227590"/>
+              <a:gd name="connsiteY0" fmla="*/ 0 h 42902"/>
+              <a:gd name="connisteX1" fmla="*/ 18675 w 227590"/>
+              <a:gd name="connsiteY1" fmla="*/ 39370 h 42902"/>
+              <a:gd name="connisteX2" fmla="*/ 21215 w 227590"/>
+              <a:gd name="connsiteY2" fmla="*/ 39370 h 42902"/>
+            </a:gdLst>
+            <a:ahLst/>
+            <a:cxnLst>
+              <a:cxn ang="0">
+                <a:pos x="connisteX0" y="connsiteY0"/>
+              </a:cxn>
+              <a:cxn ang="0">
+                <a:pos x="connisteX1" y="connsiteY1"/>
+              </a:cxn>
+              <a:cxn ang="0">
+                <a:pos x="connisteX2" y="connsiteY2"/>
+              </a:cxn>
+            </a:cxnLst>
+            <a:rect l="l" t="t" r="r" b="b"/>
+            <a:pathLst>
+              <a:path w="227591" h="42902">
+                <a:moveTo>
+                  <a:pt x="227591" y="0"/>
+                </a:moveTo>
+                <a:cubicBezTo>
+                  <a:pt x="185681" y="7620"/>
+                  <a:pt x="59951" y="31750"/>
+                  <a:pt x="18676" y="39370"/>
+                </a:cubicBezTo>
+                <a:cubicBezTo>
+                  <a:pt x="-22599" y="46990"/>
+                  <a:pt x="16771" y="40005"/>
+                  <a:pt x="21216" y="39370"/>
+                </a:cubicBezTo>
+              </a:path>
+            </a:pathLst>
+          </a:custGeom>
+          <a:noFill/>
+          <a:ln w="6350">
+            <a:solidFill>
+              <a:srgbClr val="00FF00"/>
+            </a:solidFill>
+            <a:tailEnd type="triangle" w="sm" len="sm"/>
+          </a:ln>
+        </p:spPr>
+        <p:style>
+          <a:lnRef idx="2">
+            <a:schemeClr val="accent1">
+              <a:lumMod val="75000"/>
+            </a:schemeClr>
+          </a:lnRef>
+          <a:fillRef idx="1">
+            <a:schemeClr val="accent1"/>
+          </a:fillRef>
+          <a:effectRef idx="0">
+            <a:srgbClr val="FFFFFF"/>
+          </a:effectRef>
+          <a:fontRef idx="minor">
+            <a:schemeClr val="lt1"/>
+          </a:fontRef>
+        </p:style>
+        <p:txBody>
+          <a:bodyPr rtlCol="0" anchor="ctr"/>
+          <a:p>
+            <a:pPr algn="ctr"/>
+            <a:endParaRPr lang="zh-CN" altLang="en-US"/>
+          </a:p>
+        </p:txBody>
+      </p:sp>
+      <p:sp>
+        <p:nvSpPr>
+          <p:cNvPr id="31" name="任意多边形 30"/>
+          <p:cNvSpPr/>
+          <p:nvPr/>
+        </p:nvSpPr>
+        <p:spPr>
+          <a:xfrm>
+            <a:off x="317500" y="1255395"/>
+            <a:ext cx="401955" cy="134620"/>
+          </a:xfrm>
+          <a:custGeom>
+            <a:avLst/>
+            <a:gdLst>
+              <a:gd name="connisteX0" fmla="*/ 401955 w 401955"/>
+              <a:gd name="connsiteY0" fmla="*/ 134620 h 134620"/>
+              <a:gd name="connisteX1" fmla="*/ 210820 w 401955"/>
+              <a:gd name="connsiteY1" fmla="*/ 92710 h 134620"/>
+              <a:gd name="connisteX2" fmla="*/ 73660 w 401955"/>
+              <a:gd name="connsiteY2" fmla="*/ 36830 h 134620"/>
+              <a:gd name="connisteX3" fmla="*/ 0 w 401955"/>
+              <a:gd name="connsiteY3" fmla="*/ 0 h 134620"/>
+            </a:gdLst>
+            <a:ahLst/>
+            <a:cxnLst>
+              <a:cxn ang="0">
+                <a:pos x="connisteX0" y="connsiteY0"/>
+              </a:cxn>
+              <a:cxn ang="0">
+                <a:pos x="connisteX1" y="connsiteY1"/>
+              </a:cxn>
+              <a:cxn ang="0">
+                <a:pos x="connisteX2" y="connsiteY2"/>
+              </a:cxn>
+              <a:cxn ang="0">
+                <a:pos x="connisteX3" y="connsiteY3"/>
+              </a:cxn>
+            </a:cxnLst>
+            <a:rect l="l" t="t" r="r" b="b"/>
+            <a:pathLst>
+              <a:path w="401955" h="134620">
+                <a:moveTo>
+                  <a:pt x="401955" y="134620"/>
+                </a:moveTo>
+                <a:cubicBezTo>
+                  <a:pt x="366395" y="127635"/>
+                  <a:pt x="276225" y="112395"/>
+                  <a:pt x="210820" y="92710"/>
+                </a:cubicBezTo>
+                <a:cubicBezTo>
+                  <a:pt x="145415" y="73025"/>
+                  <a:pt x="115570" y="55245"/>
+                  <a:pt x="73660" y="36830"/>
+                </a:cubicBezTo>
+                <a:cubicBezTo>
+                  <a:pt x="31750" y="18415"/>
+                  <a:pt x="12065" y="6350"/>
+                  <a:pt x="0" y="0"/>
+                </a:cubicBezTo>
+              </a:path>
+            </a:pathLst>
+          </a:custGeom>
+          <a:noFill/>
+          <a:ln w="6350">
+            <a:solidFill>
+              <a:srgbClr val="00FF00"/>
+            </a:solidFill>
+            <a:tailEnd type="triangle" w="sm" len="sm"/>
+          </a:ln>
+        </p:spPr>
+        <p:style>
+          <a:lnRef idx="2">
+            <a:schemeClr val="accent1">
+              <a:lumMod val="75000"/>
+            </a:schemeClr>
+          </a:lnRef>
+          <a:fillRef idx="1">
+            <a:schemeClr val="accent1"/>
+          </a:fillRef>
+          <a:effectRef idx="0">
+            <a:srgbClr val="FFFFFF"/>
+          </a:effectRef>
+          <a:fontRef idx="minor">
+            <a:schemeClr val="lt1"/>
+          </a:fontRef>
+        </p:style>
+        <p:txBody>
+          <a:bodyPr rtlCol="0" anchor="ctr"/>
+          <a:p>
+            <a:pPr algn="ctr"/>
+            <a:endParaRPr lang="zh-CN" altLang="en-US"/>
+          </a:p>
+        </p:txBody>
+      </p:sp>
+      <p:graphicFrame>
+        <p:nvGraphicFramePr>
+          <p:cNvPr id="32" name="对象 -2147482496"/>
+          <p:cNvGraphicFramePr>
+            <a:graphicFrameLocks noChangeAspect="1"/>
+          </p:cNvGraphicFramePr>
+          <p:nvPr/>
+        </p:nvGraphicFramePr>
+        <p:xfrm>
+          <a:off x="373381" y="1066800"/>
+          <a:ext cx="177165" cy="190500"/>
+        </p:xfrm>
+        <a:graphic>
+          <a:graphicData uri="http://schemas.openxmlformats.org/presentationml/2006/ole">
+            <mc:AlternateContent xmlns:mc="http://schemas.openxmlformats.org/markup-compatibility/2006">
+              <mc:Choice xmlns:v="urn:schemas-microsoft-com:vml" Requires="v">
+                <p:oleObj spid="_x0000_s41" name="" r:id="rId18" imgW="177165" imgH="190500" progId="DSEquations">
+                  <p:embed/>
+                </p:oleObj>
+              </mc:Choice>
+              <mc:Fallback>
+                <p:oleObj name="" r:id="rId18" imgW="177165" imgH="190500" progId="DSEquations">
+                  <p:embed/>
+                  <p:pic>
+                    <p:nvPicPr>
+                      <p:cNvPr id="0" name="图片 3075"/>
+                      <p:cNvPicPr/>
+                      <p:nvPr/>
+                    </p:nvPicPr>
+                    <p:blipFill>
+                      <a:blip r:embed="rId19"/>
+                      <a:stretch>
+                        <a:fillRect/>
+                      </a:stretch>
+                    </p:blipFill>
+                    <p:spPr>
+                      <a:xfrm>
+                        <a:off x="373381" y="1066800"/>
+                        <a:ext cx="177165" cy="190500"/>
+                      </a:xfrm>
+                      <a:prstGeom prst="rect">
+                        <a:avLst/>
+                      </a:prstGeom>
+                      <a:noFill/>
+                      <a:ln w="38100">
+                        <a:noFill/>
+                        <a:miter/>
+                      </a:ln>
+                    </p:spPr>
+                  </p:pic>
+                </p:oleObj>
+              </mc:Fallback>
+            </mc:AlternateContent>
+          </a:graphicData>
+        </a:graphic>
+      </p:graphicFrame>
+      <p:graphicFrame>
+        <p:nvGraphicFramePr>
+          <p:cNvPr id="42" name="对象 -2147482496"/>
+          <p:cNvGraphicFramePr>
+            <a:graphicFrameLocks noChangeAspect="1"/>
+          </p:cNvGraphicFramePr>
+          <p:nvPr/>
+        </p:nvGraphicFramePr>
+        <p:xfrm>
+          <a:off x="676275" y="2139950"/>
+          <a:ext cx="177165" cy="190500"/>
+        </p:xfrm>
+        <a:graphic>
+          <a:graphicData uri="http://schemas.openxmlformats.org/presentationml/2006/ole">
+            <mc:AlternateContent xmlns:mc="http://schemas.openxmlformats.org/markup-compatibility/2006">
+              <mc:Choice xmlns:v="urn:schemas-microsoft-com:vml" Requires="v">
+                <p:oleObj spid="_x0000_s47" name="" r:id="rId20" imgW="177165" imgH="190500" progId="DSEquations">
+                  <p:embed/>
+                </p:oleObj>
+              </mc:Choice>
+              <mc:Fallback>
+                <p:oleObj name="" r:id="rId20" imgW="177165" imgH="190500" progId="DSEquations">
+                  <p:embed/>
+                  <p:pic>
+                    <p:nvPicPr>
+                      <p:cNvPr id="0" name="图片 3075"/>
+                      <p:cNvPicPr/>
+                      <p:nvPr/>
+                    </p:nvPicPr>
+                    <p:blipFill>
+                      <a:blip r:embed="rId21"/>
+                      <a:stretch>
+                        <a:fillRect/>
+                      </a:stretch>
+                    </p:blipFill>
+                    <p:spPr>
+                      <a:xfrm>
+                        <a:off x="676275" y="2139950"/>
+                        <a:ext cx="177165" cy="190500"/>
+                      </a:xfrm>
+                      <a:prstGeom prst="rect">
+                        <a:avLst/>
+                      </a:prstGeom>
+                      <a:noFill/>
+                      <a:ln w="38100">
+                        <a:noFill/>
+                        <a:miter/>
+                      </a:ln>
+                    </p:spPr>
+                  </p:pic>
+                </p:oleObj>
+              </mc:Fallback>
+            </mc:AlternateContent>
+          </a:graphicData>
+        </a:graphic>
+      </p:graphicFrame>
+      <p:graphicFrame>
+        <p:nvGraphicFramePr>
+          <p:cNvPr id="5" name="对象 -2147482496"/>
+          <p:cNvGraphicFramePr>
+            <a:graphicFrameLocks noChangeAspect="1"/>
+          </p:cNvGraphicFramePr>
+          <p:nvPr/>
+        </p:nvGraphicFramePr>
+        <p:xfrm>
+          <a:off x="140359" y="1209238"/>
+          <a:ext cx="167005" cy="190500"/>
+        </p:xfrm>
+        <a:graphic>
+          <a:graphicData uri="http://schemas.openxmlformats.org/presentationml/2006/ole">
+            <mc:AlternateContent xmlns:mc="http://schemas.openxmlformats.org/markup-compatibility/2006">
+              <mc:Choice xmlns:v="urn:schemas-microsoft-com:vml" Requires="v">
+                <p:oleObj spid="_x0000_s7" name="" r:id="rId22" imgW="165100" imgH="190500" progId="DSEquations">
+                  <p:embed/>
+                </p:oleObj>
+              </mc:Choice>
+              <mc:Fallback>
+                <p:oleObj name="" r:id="rId22" imgW="165100" imgH="190500" progId="DSEquations">
+                  <p:embed/>
+                  <p:pic>
+                    <p:nvPicPr>
+                      <p:cNvPr id="0" name="图片 3075"/>
+                      <p:cNvPicPr/>
+                      <p:nvPr/>
+                    </p:nvPicPr>
+                    <p:blipFill>
+                      <a:blip r:embed="rId23"/>
+                      <a:stretch>
+                        <a:fillRect/>
+                      </a:stretch>
+                    </p:blipFill>
+                    <p:spPr>
+                      <a:xfrm>
+                        <a:off x="140359" y="1209238"/>
+                        <a:ext cx="167005" cy="190500"/>
+                      </a:xfrm>
+                      <a:prstGeom prst="rect">
+                        <a:avLst/>
+                      </a:prstGeom>
+                      <a:noFill/>
+                      <a:ln w="38100">
+                        <a:noFill/>
+                        <a:miter/>
+                      </a:ln>
+                    </p:spPr>
+                  </p:pic>
+                </p:oleObj>
+              </mc:Fallback>
+            </mc:AlternateContent>
+          </a:graphicData>
+        </a:graphic>
+      </p:graphicFrame>
+    </p:spTree>
+    <p:custDataLst>
+      <p:tags r:id="rId24"/>
     </p:custDataLst>
   </p:cSld>
   <p:clrMapOvr>
@@ -9399,6 +10662,14 @@
 </p:tagLst>
 </file>
 
+<file path=ppt/tags/tag67.xml><?xml version="1.0" encoding="utf-8"?>
+<p:tagLst xmlns:p="http://schemas.openxmlformats.org/presentationml/2006/main">
+  <p:tag name="KSO_WM_BEAUTIFY_FLAG" val="#wm#"/>
+  <p:tag name="KSO_WM_TEMPLATE_CATEGORY" val="custom"/>
+  <p:tag name="KSO_WM_TEMPLATE_INDEX" val="20205081"/>
+</p:tagLst>
+</file>
+
 <file path=ppt/tags/tag7.xml><?xml version="1.0" encoding="utf-8"?>
 <p:tagLst xmlns:p="http://schemas.openxmlformats.org/presentationml/2006/main">
   <p:tag name="KSO_WM_UNIT_HIGHLIGHT" val="0"/>
